--- a/documentation/Questions.pptx
+++ b/documentation/Questions.pptx
@@ -5,12 +5,13 @@
     <p:sldMasterId id="2147483648" r:id="rId1"/>
   </p:sldMasterIdLst>
   <p:sldIdLst>
-    <p:sldId id="260" r:id="rId2"/>
-    <p:sldId id="257" r:id="rId3"/>
-    <p:sldId id="258" r:id="rId4"/>
-    <p:sldId id="259" r:id="rId5"/>
-    <p:sldId id="261" r:id="rId6"/>
-    <p:sldId id="262" r:id="rId7"/>
+    <p:sldId id="256" r:id="rId2"/>
+    <p:sldId id="260" r:id="rId3"/>
+    <p:sldId id="257" r:id="rId4"/>
+    <p:sldId id="258" r:id="rId5"/>
+    <p:sldId id="259" r:id="rId6"/>
+    <p:sldId id="261" r:id="rId7"/>
+    <p:sldId id="262" r:id="rId8"/>
   </p:sldIdLst>
   <p:sldSz cx="12192000" cy="6858000"/>
   <p:notesSz cx="6858000" cy="9144000"/>
@@ -109,6 +110,11 @@
       </a:defRPr>
     </a:lvl9pPr>
   </p:defaultTextStyle>
+  <p:extLst>
+    <p:ext uri="{EFAFB233-063F-42B5-8137-9DF3F51BA10A}">
+      <p15:sldGuideLst xmlns:p15="http://schemas.microsoft.com/office/powerpoint/2012/main"/>
+    </p:ext>
+  </p:extLst>
 </p:presentation>
 </file>
 
@@ -259,7 +265,7 @@
           <a:p>
             <a:fld id="{21567559-8458-46B6-9C63-BE6212DF1858}" type="datetimeFigureOut">
               <a:rPr lang="fr-FR" smtClean="0"/>
-              <a:t>10/10/2026</a:t>
+              <a:t>12/10/2026</a:t>
             </a:fld>
             <a:endParaRPr lang="fr-FR"/>
           </a:p>
@@ -457,7 +463,7 @@
           <a:p>
             <a:fld id="{21567559-8458-46B6-9C63-BE6212DF1858}" type="datetimeFigureOut">
               <a:rPr lang="fr-FR" smtClean="0"/>
-              <a:t>10/10/2026</a:t>
+              <a:t>12/10/2026</a:t>
             </a:fld>
             <a:endParaRPr lang="fr-FR"/>
           </a:p>
@@ -665,7 +671,7 @@
           <a:p>
             <a:fld id="{21567559-8458-46B6-9C63-BE6212DF1858}" type="datetimeFigureOut">
               <a:rPr lang="fr-FR" smtClean="0"/>
-              <a:t>10/10/2026</a:t>
+              <a:t>12/10/2026</a:t>
             </a:fld>
             <a:endParaRPr lang="fr-FR"/>
           </a:p>
@@ -863,7 +869,7 @@
           <a:p>
             <a:fld id="{21567559-8458-46B6-9C63-BE6212DF1858}" type="datetimeFigureOut">
               <a:rPr lang="fr-FR" smtClean="0"/>
-              <a:t>10/10/2026</a:t>
+              <a:t>12/10/2026</a:t>
             </a:fld>
             <a:endParaRPr lang="fr-FR"/>
           </a:p>
@@ -1138,7 +1144,7 @@
           <a:p>
             <a:fld id="{21567559-8458-46B6-9C63-BE6212DF1858}" type="datetimeFigureOut">
               <a:rPr lang="fr-FR" smtClean="0"/>
-              <a:t>10/10/2026</a:t>
+              <a:t>12/10/2026</a:t>
             </a:fld>
             <a:endParaRPr lang="fr-FR"/>
           </a:p>
@@ -1403,7 +1409,7 @@
           <a:p>
             <a:fld id="{21567559-8458-46B6-9C63-BE6212DF1858}" type="datetimeFigureOut">
               <a:rPr lang="fr-FR" smtClean="0"/>
-              <a:t>10/10/2026</a:t>
+              <a:t>12/10/2026</a:t>
             </a:fld>
             <a:endParaRPr lang="fr-FR"/>
           </a:p>
@@ -1815,7 +1821,7 @@
           <a:p>
             <a:fld id="{21567559-8458-46B6-9C63-BE6212DF1858}" type="datetimeFigureOut">
               <a:rPr lang="fr-FR" smtClean="0"/>
-              <a:t>10/10/2026</a:t>
+              <a:t>12/10/2026</a:t>
             </a:fld>
             <a:endParaRPr lang="fr-FR"/>
           </a:p>
@@ -1956,7 +1962,7 @@
           <a:p>
             <a:fld id="{21567559-8458-46B6-9C63-BE6212DF1858}" type="datetimeFigureOut">
               <a:rPr lang="fr-FR" smtClean="0"/>
-              <a:t>10/10/2026</a:t>
+              <a:t>12/10/2026</a:t>
             </a:fld>
             <a:endParaRPr lang="fr-FR"/>
           </a:p>
@@ -2069,7 +2075,7 @@
           <a:p>
             <a:fld id="{21567559-8458-46B6-9C63-BE6212DF1858}" type="datetimeFigureOut">
               <a:rPr lang="fr-FR" smtClean="0"/>
-              <a:t>10/10/2026</a:t>
+              <a:t>12/10/2026</a:t>
             </a:fld>
             <a:endParaRPr lang="fr-FR"/>
           </a:p>
@@ -2380,7 +2386,7 @@
           <a:p>
             <a:fld id="{21567559-8458-46B6-9C63-BE6212DF1858}" type="datetimeFigureOut">
               <a:rPr lang="fr-FR" smtClean="0"/>
-              <a:t>10/10/2026</a:t>
+              <a:t>12/10/2026</a:t>
             </a:fld>
             <a:endParaRPr lang="fr-FR"/>
           </a:p>
@@ -2668,7 +2674,7 @@
           <a:p>
             <a:fld id="{21567559-8458-46B6-9C63-BE6212DF1858}" type="datetimeFigureOut">
               <a:rPr lang="fr-FR" smtClean="0"/>
-              <a:t>10/10/2026</a:t>
+              <a:t>12/10/2026</a:t>
             </a:fld>
             <a:endParaRPr lang="fr-FR"/>
           </a:p>
@@ -2909,7 +2915,7 @@
           <a:p>
             <a:fld id="{21567559-8458-46B6-9C63-BE6212DF1858}" type="datetimeFigureOut">
               <a:rPr lang="fr-FR" smtClean="0"/>
-              <a:t>10/10/2026</a:t>
+              <a:t>12/10/2026</a:t>
             </a:fld>
             <a:endParaRPr lang="fr-FR"/>
           </a:p>
@@ -3312,6 +3318,508 @@
 <file path=ppt/slides/slide1.xml><?xml version="1.0" encoding="utf-8"?>
 <p:sld xmlns:a="http://schemas.openxmlformats.org/drawingml/2006/main" xmlns:r="http://schemas.openxmlformats.org/officeDocument/2006/relationships" xmlns:p="http://schemas.openxmlformats.org/presentationml/2006/main">
   <p:cSld>
+    <p:bg>
+      <p:bgPr>
+        <a:solidFill>
+          <a:srgbClr val="0F172A"/>
+        </a:solidFill>
+        <a:effectLst/>
+      </p:bgPr>
+    </p:bg>
+    <p:spTree>
+      <p:nvGrpSpPr>
+        <p:cNvPr id="1" name=""/>
+        <p:cNvGrpSpPr/>
+        <p:nvPr/>
+      </p:nvGrpSpPr>
+      <p:grpSpPr>
+        <a:xfrm>
+          <a:off x="0" y="0"/>
+          <a:ext cx="0" cy="0"/>
+          <a:chOff x="0" y="0"/>
+          <a:chExt cx="0" cy="0"/>
+        </a:xfrm>
+      </p:grpSpPr>
+      <p:sp>
+        <p:nvSpPr>
+          <p:cNvPr id="26" name="Rectangle 25">
+            <a:extLst>
+              <a:ext uri="{FF2B5EF4-FFF2-40B4-BE49-F238E27FC236}">
+                <a16:creationId xmlns:a16="http://schemas.microsoft.com/office/drawing/2014/main" id="{292C19DA-DEB1-B461-E9AB-D52E896EC6C3}"/>
+              </a:ext>
+            </a:extLst>
+          </p:cNvPr>
+          <p:cNvSpPr/>
+          <p:nvPr/>
+        </p:nvSpPr>
+        <p:spPr>
+          <a:xfrm>
+            <a:off x="609600" y="4410967"/>
+            <a:ext cx="10972800" cy="666750"/>
+          </a:xfrm>
+          <a:prstGeom prst="rect">
+            <a:avLst/>
+          </a:prstGeom>
+          <a:noFill/>
+          <a:ln w="9525" cap="flat" cmpd="sng" algn="ctr">
+            <a:noFill/>
+            <a:prstDash val="solid"/>
+          </a:ln>
+          <a:effectLst/>
+        </p:spPr>
+        <p:txBody>
+          <a:bodyPr rtlCol="0" anchor="ctr"/>
+          <a:lstStyle/>
+          <a:p>
+            <a:pPr marL="0" marR="0" lvl="0" indent="0" algn="ctr" defTabSz="457200" eaLnBrk="1" fontAlgn="auto" latinLnBrk="0" hangingPunct="1">
+              <a:lnSpc>
+                <a:spcPct val="100000"/>
+              </a:lnSpc>
+              <a:spcBef>
+                <a:spcPts val="0"/>
+              </a:spcBef>
+              <a:spcAft>
+                <a:spcPts val="0"/>
+              </a:spcAft>
+              <a:buClrTx/>
+              <a:buSzTx/>
+              <a:buFontTx/>
+              <a:buNone/>
+              <a:tabLst/>
+              <a:defRPr/>
+            </a:pPr>
+            <a:endParaRPr kumimoji="0" sz="1800" b="0" i="0" u="none" strike="noStrike" kern="0" cap="none" spc="0" normalizeH="0" baseline="0" noProof="0">
+              <a:ln>
+                <a:noFill/>
+              </a:ln>
+              <a:solidFill>
+                <a:prstClr val="white"/>
+              </a:solidFill>
+              <a:effectLst/>
+              <a:uLnTx/>
+              <a:uFillTx/>
+              <a:latin typeface="Calibri"/>
+              <a:ea typeface="+mn-ea"/>
+              <a:cs typeface="+mn-cs"/>
+            </a:endParaRPr>
+          </a:p>
+        </p:txBody>
+      </p:sp>
+      <p:sp>
+        <p:nvSpPr>
+          <p:cNvPr id="27" name="Rounded Rectangle 2">
+            <a:extLst>
+              <a:ext uri="{FF2B5EF4-FFF2-40B4-BE49-F238E27FC236}">
+                <a16:creationId xmlns:a16="http://schemas.microsoft.com/office/drawing/2014/main" id="{EB79E0C3-0313-B1B6-5EED-84721CF35D83}"/>
+              </a:ext>
+            </a:extLst>
+          </p:cNvPr>
+          <p:cNvSpPr/>
+          <p:nvPr/>
+        </p:nvSpPr>
+        <p:spPr>
+          <a:xfrm>
+            <a:off x="609600" y="1780282"/>
+            <a:ext cx="1762125" cy="276225"/>
+          </a:xfrm>
+          <a:prstGeom prst="roundRect">
+            <a:avLst>
+              <a:gd name="adj" fmla="val 50000"/>
+            </a:avLst>
+          </a:prstGeom>
+          <a:solidFill>
+            <a:srgbClr val="0F2C47"/>
+          </a:solidFill>
+          <a:ln w="9525" cap="flat" cmpd="sng" algn="ctr">
+            <a:noFill/>
+            <a:prstDash val="solid"/>
+          </a:ln>
+          <a:effectLst/>
+        </p:spPr>
+        <p:txBody>
+          <a:bodyPr rtlCol="0" anchor="ctr"/>
+          <a:lstStyle/>
+          <a:p>
+            <a:pPr marL="0" marR="0" lvl="0" indent="0" algn="ctr" defTabSz="457200" eaLnBrk="1" fontAlgn="auto" latinLnBrk="0" hangingPunct="1">
+              <a:lnSpc>
+                <a:spcPct val="100000"/>
+              </a:lnSpc>
+              <a:spcBef>
+                <a:spcPts val="0"/>
+              </a:spcBef>
+              <a:spcAft>
+                <a:spcPts val="0"/>
+              </a:spcAft>
+              <a:buClrTx/>
+              <a:buSzTx/>
+              <a:buFontTx/>
+              <a:buNone/>
+              <a:tabLst/>
+              <a:defRPr/>
+            </a:pPr>
+            <a:endParaRPr kumimoji="0" sz="1800" b="0" i="0" u="none" strike="noStrike" kern="0" cap="none" spc="0" normalizeH="0" baseline="0" noProof="0">
+              <a:ln>
+                <a:noFill/>
+              </a:ln>
+              <a:solidFill>
+                <a:prstClr val="white"/>
+              </a:solidFill>
+              <a:effectLst/>
+              <a:uLnTx/>
+              <a:uFillTx/>
+              <a:latin typeface="Calibri"/>
+              <a:ea typeface="+mn-ea"/>
+              <a:cs typeface="+mn-cs"/>
+            </a:endParaRPr>
+          </a:p>
+        </p:txBody>
+      </p:sp>
+      <p:sp>
+        <p:nvSpPr>
+          <p:cNvPr id="28" name="Rectangle 27">
+            <a:extLst>
+              <a:ext uri="{FF2B5EF4-FFF2-40B4-BE49-F238E27FC236}">
+                <a16:creationId xmlns:a16="http://schemas.microsoft.com/office/drawing/2014/main" id="{5F65ECAD-55A9-AEC6-66CF-A7FF7ACA2490}"/>
+              </a:ext>
+            </a:extLst>
+          </p:cNvPr>
+          <p:cNvSpPr/>
+          <p:nvPr/>
+        </p:nvSpPr>
+        <p:spPr>
+          <a:xfrm>
+            <a:off x="609600" y="4410967"/>
+            <a:ext cx="10972800" cy="9525"/>
+          </a:xfrm>
+          <a:prstGeom prst="rect">
+            <a:avLst/>
+          </a:prstGeom>
+          <a:solidFill>
+            <a:srgbClr val="334155"/>
+          </a:solidFill>
+          <a:ln w="9525" cap="flat" cmpd="sng" algn="ctr">
+            <a:noFill/>
+            <a:prstDash val="solid"/>
+          </a:ln>
+          <a:effectLst/>
+        </p:spPr>
+        <p:txBody>
+          <a:bodyPr rtlCol="0" anchor="ctr"/>
+          <a:lstStyle/>
+          <a:p>
+            <a:pPr marL="0" marR="0" lvl="0" indent="0" algn="ctr" defTabSz="457200" eaLnBrk="1" fontAlgn="auto" latinLnBrk="0" hangingPunct="1">
+              <a:lnSpc>
+                <a:spcPct val="100000"/>
+              </a:lnSpc>
+              <a:spcBef>
+                <a:spcPts val="0"/>
+              </a:spcBef>
+              <a:spcAft>
+                <a:spcPts val="0"/>
+              </a:spcAft>
+              <a:buClrTx/>
+              <a:buSzTx/>
+              <a:buFontTx/>
+              <a:buNone/>
+              <a:tabLst/>
+              <a:defRPr/>
+            </a:pPr>
+            <a:endParaRPr kumimoji="0" sz="1800" b="0" i="0" u="none" strike="noStrike" kern="0" cap="none" spc="0" normalizeH="0" baseline="0" noProof="0">
+              <a:ln>
+                <a:noFill/>
+              </a:ln>
+              <a:solidFill>
+                <a:prstClr val="white"/>
+              </a:solidFill>
+              <a:effectLst/>
+              <a:uLnTx/>
+              <a:uFillTx/>
+              <a:latin typeface="Calibri"/>
+              <a:ea typeface="+mn-ea"/>
+              <a:cs typeface="+mn-cs"/>
+            </a:endParaRPr>
+          </a:p>
+        </p:txBody>
+      </p:sp>
+      <p:sp>
+        <p:nvSpPr>
+          <p:cNvPr id="29" name="TextBox 4">
+            <a:extLst>
+              <a:ext uri="{FF2B5EF4-FFF2-40B4-BE49-F238E27FC236}">
+                <a16:creationId xmlns:a16="http://schemas.microsoft.com/office/drawing/2014/main" id="{B7040EE0-91CD-00E7-62FD-9B29D69AC7A2}"/>
+              </a:ext>
+            </a:extLst>
+          </p:cNvPr>
+          <p:cNvSpPr txBox="1"/>
+          <p:nvPr/>
+        </p:nvSpPr>
+        <p:spPr>
+          <a:xfrm>
+            <a:off x="609600" y="2056507"/>
+            <a:ext cx="8601075" cy="589905"/>
+          </a:xfrm>
+          <a:prstGeom prst="rect">
+            <a:avLst/>
+          </a:prstGeom>
+          <a:noFill/>
+        </p:spPr>
+        <p:txBody>
+          <a:bodyPr wrap="square" lIns="0" tIns="0" rIns="0" bIns="0" anchor="t">
+            <a:spAutoFit/>
+          </a:bodyPr>
+          <a:lstStyle/>
+          <a:p>
+            <a:pPr defTabSz="457200">
+              <a:lnSpc>
+                <a:spcPts val="4620"/>
+              </a:lnSpc>
+            </a:pPr>
+            <a:r>
+              <a:rPr lang="fr-FR" sz="4200" b="1" dirty="0">
+                <a:solidFill>
+                  <a:srgbClr val="F8FAFC"/>
+                </a:solidFill>
+                <a:latin typeface="Inter"/>
+              </a:rPr>
+              <a:t>Building Perceptron</a:t>
+            </a:r>
+            <a:endParaRPr sz="4200" b="1" dirty="0">
+              <a:solidFill>
+                <a:srgbClr val="F8FAFC"/>
+              </a:solidFill>
+              <a:latin typeface="Inter"/>
+            </a:endParaRPr>
+          </a:p>
+        </p:txBody>
+      </p:sp>
+      <p:sp>
+        <p:nvSpPr>
+          <p:cNvPr id="30" name="TextBox 5">
+            <a:extLst>
+              <a:ext uri="{FF2B5EF4-FFF2-40B4-BE49-F238E27FC236}">
+                <a16:creationId xmlns:a16="http://schemas.microsoft.com/office/drawing/2014/main" id="{AD238BED-4D97-C440-EBA2-B6B675E7D86B}"/>
+              </a:ext>
+            </a:extLst>
+          </p:cNvPr>
+          <p:cNvSpPr txBox="1"/>
+          <p:nvPr/>
+        </p:nvSpPr>
+        <p:spPr>
+          <a:xfrm>
+            <a:off x="609600" y="3458467"/>
+            <a:ext cx="6572250" cy="246221"/>
+          </a:xfrm>
+          <a:prstGeom prst="rect">
+            <a:avLst/>
+          </a:prstGeom>
+          <a:noFill/>
+        </p:spPr>
+        <p:txBody>
+          <a:bodyPr wrap="square" lIns="0" tIns="0" rIns="0" bIns="0" anchor="t">
+            <a:spAutoFit/>
+          </a:bodyPr>
+          <a:lstStyle/>
+          <a:p>
+            <a:pPr defTabSz="457200">
+              <a:lnSpc>
+                <a:spcPct val="100000"/>
+              </a:lnSpc>
+            </a:pPr>
+            <a:r>
+              <a:rPr lang="fr-FR" sz="1600" dirty="0">
+                <a:solidFill>
+                  <a:schemeClr val="bg1"/>
+                </a:solidFill>
+              </a:rPr>
+              <a:t>Du neurone biologique à la classification linéaire</a:t>
+            </a:r>
+            <a:endParaRPr sz="1500" dirty="0">
+              <a:solidFill>
+                <a:schemeClr val="bg1"/>
+              </a:solidFill>
+              <a:latin typeface="Inter"/>
+            </a:endParaRPr>
+          </a:p>
+        </p:txBody>
+      </p:sp>
+      <p:sp>
+        <p:nvSpPr>
+          <p:cNvPr id="31" name="TextBox 6">
+            <a:extLst>
+              <a:ext uri="{FF2B5EF4-FFF2-40B4-BE49-F238E27FC236}">
+                <a16:creationId xmlns:a16="http://schemas.microsoft.com/office/drawing/2014/main" id="{1AE35FEE-3856-913B-D003-A0DB16FD1297}"/>
+              </a:ext>
+            </a:extLst>
+          </p:cNvPr>
+          <p:cNvSpPr txBox="1"/>
+          <p:nvPr/>
+        </p:nvSpPr>
+        <p:spPr>
+          <a:xfrm>
+            <a:off x="762000" y="1837432"/>
+            <a:ext cx="1552575" cy="161925"/>
+          </a:xfrm>
+          <a:prstGeom prst="rect">
+            <a:avLst/>
+          </a:prstGeom>
+          <a:noFill/>
+        </p:spPr>
+        <p:txBody>
+          <a:bodyPr wrap="square" lIns="0" tIns="0" rIns="0" bIns="0" anchor="t">
+            <a:spAutoFit/>
+          </a:bodyPr>
+          <a:lstStyle/>
+          <a:p>
+            <a:pPr defTabSz="457200"/>
+            <a:r>
+              <a:rPr sz="1050" b="1">
+                <a:solidFill>
+                  <a:srgbClr val="38BDF8"/>
+                </a:solidFill>
+                <a:latin typeface="Inter"/>
+              </a:rPr>
+              <a:t>FRAMEWORK AGILE</a:t>
+            </a:r>
+          </a:p>
+        </p:txBody>
+      </p:sp>
+      <p:sp>
+        <p:nvSpPr>
+          <p:cNvPr id="33" name="TextBox 8">
+            <a:extLst>
+              <a:ext uri="{FF2B5EF4-FFF2-40B4-BE49-F238E27FC236}">
+                <a16:creationId xmlns:a16="http://schemas.microsoft.com/office/drawing/2014/main" id="{AB4F6F29-B87D-4761-0515-6059D5EAD02A}"/>
+              </a:ext>
+            </a:extLst>
+          </p:cNvPr>
+          <p:cNvSpPr txBox="1"/>
+          <p:nvPr/>
+        </p:nvSpPr>
+        <p:spPr>
+          <a:xfrm>
+            <a:off x="609600" y="4687192"/>
+            <a:ext cx="537006" cy="161583"/>
+          </a:xfrm>
+          <a:prstGeom prst="rect">
+            <a:avLst/>
+          </a:prstGeom>
+          <a:noFill/>
+        </p:spPr>
+        <p:txBody>
+          <a:bodyPr wrap="none" lIns="0" tIns="0" rIns="0" bIns="0" anchor="t">
+            <a:spAutoFit/>
+          </a:bodyPr>
+          <a:lstStyle/>
+          <a:p>
+            <a:pPr defTabSz="457200"/>
+            <a:r>
+              <a:rPr lang="fr-FR" sz="1050" dirty="0">
+                <a:solidFill>
+                  <a:srgbClr val="64748B"/>
+                </a:solidFill>
+                <a:latin typeface="Inter"/>
+              </a:rPr>
+              <a:t>Mots</a:t>
+            </a:r>
+            <a:r>
+              <a:rPr sz="1050" dirty="0">
+                <a:solidFill>
+                  <a:srgbClr val="64748B"/>
+                </a:solidFill>
+                <a:latin typeface="Inter"/>
+              </a:rPr>
+              <a:t> </a:t>
+            </a:r>
+            <a:r>
+              <a:rPr sz="1050" dirty="0" err="1">
+                <a:solidFill>
+                  <a:srgbClr val="64748B"/>
+                </a:solidFill>
+                <a:latin typeface="Inter"/>
+              </a:rPr>
+              <a:t>Clés</a:t>
+            </a:r>
+            <a:endParaRPr sz="1050" dirty="0">
+              <a:solidFill>
+                <a:srgbClr val="64748B"/>
+              </a:solidFill>
+              <a:latin typeface="Inter"/>
+            </a:endParaRPr>
+          </a:p>
+        </p:txBody>
+      </p:sp>
+      <p:sp>
+        <p:nvSpPr>
+          <p:cNvPr id="34" name="TextBox 9">
+            <a:extLst>
+              <a:ext uri="{FF2B5EF4-FFF2-40B4-BE49-F238E27FC236}">
+                <a16:creationId xmlns:a16="http://schemas.microsoft.com/office/drawing/2014/main" id="{002C3245-5854-E199-A9A0-62CFB60A275D}"/>
+              </a:ext>
+            </a:extLst>
+          </p:cNvPr>
+          <p:cNvSpPr txBox="1"/>
+          <p:nvPr/>
+        </p:nvSpPr>
+        <p:spPr>
+          <a:xfrm>
+            <a:off x="609599" y="4887217"/>
+            <a:ext cx="3857469" cy="184666"/>
+          </a:xfrm>
+          <a:prstGeom prst="rect">
+            <a:avLst/>
+          </a:prstGeom>
+          <a:noFill/>
+        </p:spPr>
+        <p:txBody>
+          <a:bodyPr wrap="square" lIns="0" tIns="0" rIns="0" bIns="0" anchor="t">
+            <a:spAutoFit/>
+          </a:bodyPr>
+          <a:lstStyle/>
+          <a:p>
+            <a:pPr defTabSz="457200"/>
+            <a:r>
+              <a:rPr lang="fr-FR" sz="1200" b="1">
+                <a:solidFill>
+                  <a:srgbClr val="E2E8F0"/>
+                </a:solidFill>
+                <a:latin typeface="Inter"/>
+              </a:rPr>
+              <a:t>Neurone </a:t>
+            </a:r>
+            <a:r>
+              <a:rPr lang="fr-FR" sz="1200" b="1" dirty="0">
+                <a:solidFill>
+                  <a:srgbClr val="E2E8F0"/>
+                </a:solidFill>
+                <a:latin typeface="Inter"/>
+              </a:rPr>
+              <a:t>artificiel, Classifieur linéaire, Fonction de seuil</a:t>
+            </a:r>
+            <a:endParaRPr sz="1200" b="1" dirty="0">
+              <a:solidFill>
+                <a:srgbClr val="E2E8F0"/>
+              </a:solidFill>
+              <a:latin typeface="Inter"/>
+            </a:endParaRPr>
+          </a:p>
+        </p:txBody>
+      </p:sp>
+    </p:spTree>
+    <p:extLst>
+      <p:ext uri="{BB962C8B-B14F-4D97-AF65-F5344CB8AC3E}">
+        <p14:creationId xmlns:p14="http://schemas.microsoft.com/office/powerpoint/2010/main" val="1265141368"/>
+      </p:ext>
+    </p:extLst>
+  </p:cSld>
+  <p:clrMapOvr>
+    <a:masterClrMapping/>
+  </p:clrMapOvr>
+</p:sld>
+</file>
+
+<file path=ppt/slides/slide2.xml><?xml version="1.0" encoding="utf-8"?>
+<p:sld xmlns:a="http://schemas.openxmlformats.org/drawingml/2006/main" xmlns:r="http://schemas.openxmlformats.org/officeDocument/2006/relationships" xmlns:p="http://schemas.openxmlformats.org/presentationml/2006/main">
+  <p:cSld>
     <p:spTree>
       <p:nvGrpSpPr>
         <p:cNvPr id="1" name="">
@@ -3993,7 +4501,7 @@
 </p:sld>
 </file>
 
-<file path=ppt/slides/slide2.xml><?xml version="1.0" encoding="utf-8"?>
+<file path=ppt/slides/slide3.xml><?xml version="1.0" encoding="utf-8"?>
 <p:sld xmlns:a="http://schemas.openxmlformats.org/drawingml/2006/main" xmlns:r="http://schemas.openxmlformats.org/officeDocument/2006/relationships" xmlns:p="http://schemas.openxmlformats.org/presentationml/2006/main">
   <p:cSld>
     <p:spTree>
@@ -4059,7 +4567,7 @@
 </p:sld>
 </file>
 
-<file path=ppt/slides/slide3.xml><?xml version="1.0" encoding="utf-8"?>
+<file path=ppt/slides/slide4.xml><?xml version="1.0" encoding="utf-8"?>
 <p:sld xmlns:a="http://schemas.openxmlformats.org/drawingml/2006/main" xmlns:r="http://schemas.openxmlformats.org/officeDocument/2006/relationships" xmlns:p="http://schemas.openxmlformats.org/presentationml/2006/main">
   <p:cSld>
     <p:spTree>
@@ -4125,7 +4633,7 @@
 </p:sld>
 </file>
 
-<file path=ppt/slides/slide4.xml><?xml version="1.0" encoding="utf-8"?>
+<file path=ppt/slides/slide5.xml><?xml version="1.0" encoding="utf-8"?>
 <p:sld xmlns:a="http://schemas.openxmlformats.org/drawingml/2006/main" xmlns:r="http://schemas.openxmlformats.org/officeDocument/2006/relationships" xmlns:p="http://schemas.openxmlformats.org/presentationml/2006/main">
   <p:cSld>
     <p:spTree>
@@ -4191,7 +4699,7 @@
 </p:sld>
 </file>
 
-<file path=ppt/slides/slide5.xml><?xml version="1.0" encoding="utf-8"?>
+<file path=ppt/slides/slide6.xml><?xml version="1.0" encoding="utf-8"?>
 <p:sld xmlns:a="http://schemas.openxmlformats.org/drawingml/2006/main" xmlns:r="http://schemas.openxmlformats.org/officeDocument/2006/relationships" xmlns:p="http://schemas.openxmlformats.org/presentationml/2006/main">
   <p:cSld>
     <p:spTree>
@@ -5026,7 +5534,7 @@
 </p:sld>
 </file>
 
-<file path=ppt/slides/slide6.xml><?xml version="1.0" encoding="utf-8"?>
+<file path=ppt/slides/slide7.xml><?xml version="1.0" encoding="utf-8"?>
 <p:sld xmlns:a="http://schemas.openxmlformats.org/drawingml/2006/main" xmlns:r="http://schemas.openxmlformats.org/officeDocument/2006/relationships" xmlns:p="http://schemas.openxmlformats.org/presentationml/2006/main">
   <p:cSld>
     <p:spTree>
